--- a/docs/decks/BrokerVerse_Customer_Services_Guide.pptx
+++ b/docs/decks/BrokerVerse_Customer_Services_Guide.pptx
@@ -3273,7 +3273,7 @@
                 </a:solidFill>
                 <a:latin typeface="Calibri"/>
               </a:rPr>
-              <a:t>BDO Insure (BDOI) insurance broking · Philippines · PHP</a:t>
+              <a:t>BrokerVerse OOTB · insurance broking · Philippines · PHP</a:t>
             </a:r>
           </a:p>
         </p:txBody>
@@ -3820,7 +3820,7 @@
                 </a:solidFill>
                 <a:latin typeface="Calibri"/>
               </a:rPr>
-              <a:t>Home (business overview dashboard)</a:t>
+              <a:t>Executive Dashboard</a:t>
             </a:r>
           </a:p>
         </p:txBody>
@@ -7214,7 +7214,7 @@
                 </a:solidFill>
                 <a:latin typeface="Calibri"/>
               </a:rPr>
-              <a:t>REPORTS &gt; OPERATIONAL / FINANCIAL</a:t>
+              <a:t>REPORTS &gt; ALL REPORTS</a:t>
             </a:r>
           </a:p>
         </p:txBody>
@@ -7708,7 +7708,7 @@
                 </a:solidFill>
                 <a:latin typeface="Calibri"/>
               </a:rPr>
-              <a:t>Nine operational reports in your catalogue.</a:t>
+              <a:t>Nine operational reports in Reports &gt; All Reports.</a:t>
             </a:r>
           </a:p>
         </p:txBody>
@@ -7861,7 +7861,7 @@
                           </a:solidFill>
                           <a:latin typeface="Calibri"/>
                         </a:rPr>
-                        <a:t>Reports &gt; Operational &gt; Production</a:t>
+                        <a:t>All Reports; Operational &gt; Production</a:t>
                       </a:r>
                     </a:p>
                   </a:txBody>
@@ -7929,7 +7929,7 @@
                           </a:solidFill>
                           <a:latin typeface="Calibri"/>
                         </a:rPr>
-                        <a:t>Reports &gt; Operational &gt; Claims</a:t>
+                        <a:t>All Reports; Operational &gt; Claims</a:t>
                       </a:r>
                     </a:p>
                   </a:txBody>
@@ -7997,7 +7997,7 @@
                           </a:solidFill>
                           <a:latin typeface="Calibri"/>
                         </a:rPr>
-                        <a:t>Reports &gt; Operational &gt; Renewal</a:t>
+                        <a:t>All Reports; Operational &gt; Renewal</a:t>
                       </a:r>
                     </a:p>
                   </a:txBody>
@@ -8065,7 +8065,7 @@
                           </a:solidFill>
                           <a:latin typeface="Calibri"/>
                         </a:rPr>
-                        <a:t>Reports &gt; Operational &gt; Remittance</a:t>
+                        <a:t>All Reports; Operational &gt; Remittance</a:t>
                       </a:r>
                     </a:p>
                   </a:txBody>
@@ -8133,7 +8133,7 @@
                           </a:solidFill>
                           <a:latin typeface="Calibri"/>
                         </a:rPr>
-                        <a:t>Reports &gt; Operational &gt; Broker Commission</a:t>
+                        <a:t>All Reports; Operational &gt; Broker Commission</a:t>
                       </a:r>
                     </a:p>
                   </a:txBody>
@@ -8201,7 +8201,7 @@
                           </a:solidFill>
                           <a:latin typeface="Calibri"/>
                         </a:rPr>
-                        <a:t>Executive Dashboard &gt; Export Report</a:t>
+                        <a:t>Reports &gt; All Reports</a:t>
                       </a:r>
                     </a:p>
                   </a:txBody>
@@ -8269,7 +8269,7 @@
                           </a:solidFill>
                           <a:latin typeface="Calibri"/>
                         </a:rPr>
-                        <a:t>Executive Dashboard &gt; Export Report</a:t>
+                        <a:t>Reports &gt; All Reports</a:t>
                       </a:r>
                     </a:p>
                   </a:txBody>
@@ -8337,7 +8337,7 @@
                           </a:solidFill>
                           <a:latin typeface="Calibri"/>
                         </a:rPr>
-                        <a:t>Claims Dashboard &gt; Export Report</a:t>
+                        <a:t>Reports &gt; All Reports</a:t>
                       </a:r>
                     </a:p>
                   </a:txBody>
@@ -8405,7 +8405,7 @@
                           </a:solidFill>
                           <a:latin typeface="Calibri"/>
                         </a:rPr>
-                        <a:t>Leads &gt; Generate Report</a:t>
+                        <a:t>Reports &gt; All Reports</a:t>
                       </a:r>
                     </a:p>
                   </a:txBody>
@@ -10456,7 +10456,7 @@
                 </a:solidFill>
                 <a:latin typeface="Calibri"/>
               </a:rPr>
-              <a:t>Some date pickers still show month-first dates (MM/DD/YYYY) although the configured format is DD/MM/YYYY.</a:t>
+              <a:t>Your session is kept in the browser’s local storage: sign out on shared computers and keep the browser up to date.</a:t>
             </a:r>
           </a:p>
           <a:p>
@@ -10477,7 +10477,7 @@
                 </a:solidFill>
                 <a:latin typeface="Calibri"/>
               </a:rPr>
-              <a:t>A few screens use the browser’s own confirm boxes instead of in-app dialogs.</a:t>
+              <a:t>Two-factor set-up shows a setup key and an app link, but no QR code: type the key into the authenticator app.</a:t>
             </a:r>
           </a:p>
           <a:p>
@@ -10498,7 +10498,7 @@
                 </a:solidFill>
                 <a:latin typeface="Calibri"/>
               </a:rPr>
-              <a:t>“Proceed to payment” is still offered for an endorsement with no premium change: ignore it.</a:t>
+              <a:t>Screens are in English or Thai; Filipino is configured but has no translation yet.</a:t>
             </a:r>
           </a:p>
           <a:p>
@@ -10519,28 +10519,7 @@
                 </a:solidFill>
                 <a:latin typeface="Calibri"/>
               </a:rPr>
-              <a:t>Some endorsement and client headers may show an internal ID instead of the client code.</a:t>
-            </a:r>
-          </a:p>
-          <a:p>
-            <a:pPr marL="201168" indent="-182880">
-              <a:spcAft>
-                <a:spcPts val="800"/>
-              </a:spcAft>
-              <a:buClr>
-                <a:srgbClr val="5B6778"/>
-              </a:buClr>
-              <a:buFont typeface="Arial"/>
-              <a:buChar char="•"/>
-            </a:pPr>
-            <a:r>
-              <a:rPr sz="1500">
-                <a:solidFill>
-                  <a:srgbClr val="1F2937"/>
-                </a:solidFill>
-                <a:latin typeface="Calibri"/>
-              </a:rPr>
-              <a:t>The Clients list can fail to open for this role in the current build: use Policy and open the client.</a:t>
+              <a:t>Endorsement is offered only on policies in force whose premium is not Pending or Reviewing: renew an expired policy instead.</a:t>
             </a:r>
           </a:p>
         </p:txBody>
@@ -11031,7 +11010,7 @@
                 </a:solidFill>
                 <a:latin typeface="Calibri"/>
               </a:rPr>
-              <a:t>&lt;to be confirmed by BDOI&gt;</a:t>
+              <a:t>&lt;service desk to be confirmed&gt;</a:t>
             </a:r>
           </a:p>
         </p:txBody>
@@ -11824,7 +11803,7 @@
                 </a:solidFill>
                 <a:latin typeface="Calibri"/>
               </a:rPr>
-              <a:t>User name ana.cs. Lands on Home, the business overview dashboard.</a:t>
+              <a:t>User name ana.cs. Lands on the Executive Dashboard; start the day on Operations &gt; Open Items.</a:t>
             </a:r>
           </a:p>
         </p:txBody>
@@ -13176,6 +13155,27 @@
                 </a:solidFill>
                 <a:latin typeface="Calibri"/>
               </a:rPr>
+              <a:t>All Reports (9 reports)</a:t>
+            </a:r>
+          </a:p>
+          <a:p>
+            <a:pPr marL="201168" indent="-182880">
+              <a:spcAft>
+                <a:spcPts val="200"/>
+              </a:spcAft>
+              <a:buClr>
+                <a:srgbClr val="1E88E5"/>
+              </a:buClr>
+              <a:buFont typeface="Arial"/>
+              <a:buChar char="•"/>
+            </a:pPr>
+            <a:r>
+              <a:rPr sz="1500">
+                <a:solidFill>
+                  <a:srgbClr val="1F2937"/>
+                </a:solidFill>
+                <a:latin typeface="Calibri"/>
+              </a:rPr>
               <a:t>Operational Reports: Production, Claims, Renewal, Remittance, Broker Commission</a:t>
             </a:r>
           </a:p>
@@ -13642,7 +13642,7 @@
                 </a:solidFill>
                 <a:latin typeface="Calibri"/>
               </a:rPr>
-              <a:t>one client with tabs for Policy, Claim, Renewal and Endorsement.</a:t>
+              <a:t>one client (header shows the CL- code) with tabs for Policy, Claim, Renewal and Endorsement.</a:t>
             </a:r>
           </a:p>
           <a:p>
@@ -13672,7 +13672,7 @@
                 </a:solidFill>
                 <a:latin typeface="Calibri"/>
               </a:rPr>
-              <a:t>endorsement, claim request, renewal.</a:t>
+              <a:t>endorsement, claim request, renewal; endorsements listed with END- number and type.</a:t>
             </a:r>
           </a:p>
           <a:p>
@@ -14228,7 +14228,7 @@
                 </a:solidFill>
                 <a:latin typeface="Calibri"/>
               </a:rPr>
-              <a:t>open, endorse, renew; Bulk Upload and Create Policy.</a:t>
+              <a:t>open; row menu Claim, Endorsement, Reminder (disabled while premium is Pending or Reviewing).</a:t>
             </a:r>
           </a:p>
         </p:txBody>
@@ -14468,7 +14468,7 @@
         <p:spPr>
           <a:xfrm>
             <a:off x="420624" y="1243584"/>
-            <a:ext cx="7315200" cy="4599432"/>
+            <a:ext cx="5246043" cy="4599432"/>
           </a:xfrm>
           <a:prstGeom prst="rect">
             <a:avLst/>
@@ -14522,7 +14522,7 @@
         <p:spPr>
           <a:xfrm>
             <a:off x="457200" y="1280160"/>
-            <a:ext cx="7242048" cy="4526280"/>
+            <a:ext cx="5172891" cy="4526280"/>
           </a:xfrm>
           <a:prstGeom prst="rect">
             <a:avLst/>
@@ -14562,7 +14562,7 @@
                 </a:solidFill>
                 <a:latin typeface="Calibri"/>
               </a:rPr>
-              <a:t>Screen from the recorded end-to-end run — Endorsement request, personal details (END-2026-00002) — ana.cs</a:t>
+              <a:t>Live screen — Endorsement request, personal details change — signed in as ana.cs</a:t>
             </a:r>
           </a:p>
         </p:txBody>
@@ -14695,6 +14695,36 @@
                 <a:latin typeface="Calibri"/>
               </a:rPr>
               <a:t>choose the endorsement type first; Proceed stays disabled until you do.</a:t>
+            </a:r>
+          </a:p>
+          <a:p>
+            <a:pPr marL="201168" indent="-182880">
+              <a:spcAft>
+                <a:spcPts val="1000"/>
+              </a:spcAft>
+              <a:buClr>
+                <a:srgbClr val="1E88E5"/>
+              </a:buClr>
+              <a:buFont typeface="Arial"/>
+              <a:buChar char="•"/>
+            </a:pPr>
+            <a:r>
+              <a:rPr b="1" sz="1500">
+                <a:solidFill>
+                  <a:srgbClr val="0B4F9C"/>
+                </a:solidFill>
+                <a:latin typeface="Calibri"/>
+              </a:rPr>
+              <a:t>Pre-filled:  </a:t>
+            </a:r>
+            <a:r>
+              <a:rPr sz="1500">
+                <a:solidFill>
+                  <a:srgbClr val="1F2937"/>
+                </a:solidFill>
+                <a:latin typeface="Calibri"/>
+              </a:rPr>
+              <a:t>with the client’s current details, including earlier endorsements.</a:t>
             </a:r>
           </a:p>
           <a:p>
@@ -14994,7 +15024,7 @@
         <p:spPr>
           <a:xfrm>
             <a:off x="420624" y="1243584"/>
-            <a:ext cx="7315200" cy="4599432"/>
+            <a:ext cx="4903023" cy="4599432"/>
           </a:xfrm>
           <a:prstGeom prst="rect">
             <a:avLst/>
@@ -15048,7 +15078,7 @@
         <p:spPr>
           <a:xfrm>
             <a:off x="457200" y="1280160"/>
-            <a:ext cx="7242048" cy="4526280"/>
+            <a:ext cx="4829871" cy="4526280"/>
           </a:xfrm>
           <a:prstGeom prst="rect">
             <a:avLst/>
@@ -15088,7 +15118,7 @@
                 </a:solidFill>
                 <a:latin typeface="Calibri"/>
               </a:rPr>
-              <a:t>Screen from the recorded end-to-end run — Endorsement request, coverage change (END-2026-00003) — ana.cs</a:t>
+              <a:t>Live screen — Endorsement request, coverage change re-priced — signed in as ana.cs</a:t>
             </a:r>
           </a:p>
         </p:txBody>
@@ -16332,7 +16362,7 @@
                 </a:solidFill>
                 <a:latin typeface="Calibri"/>
               </a:rPr>
-              <a:t>paid, pending, processing, by policy or endorsement.</a:t>
+              <a:t>Paid, Pending, Reviewing; type policy, renewal or endorsement; DIRECT BILL for direct-bill policies.</a:t>
             </a:r>
           </a:p>
           <a:p>
